--- a/fp_sfp_presentation_short.pptx
+++ b/fp_sfp_presentation_short.pptx
@@ -297,7 +297,7 @@
           <a:bodyPr/>
           <a:lstStyle/>
           <a:p>
-            <a:fld id="{C7E4E9C9-9016-4368-BA52-5736E646B3E9}" type="datetimeFigureOut">
+            <a:fld id="{2E653D21-FDBD-4484-ADF8-8F544B7EA25E}" type="datetimeFigureOut">
               <a:rPr lang="ru-RU" smtClean="0"/>
               <a:t>15.04.2026</a:t>
             </a:fld>
@@ -339,7 +339,7 @@
           <a:bodyPr/>
           <a:lstStyle/>
           <a:p>
-            <a:fld id="{16FDC8A4-5E87-4C3F-9CFD-168A28BF40D9}" type="slidenum">
+            <a:fld id="{B5C6536A-5FA9-4DEE-8A2F-80058FF184E8}" type="slidenum">
               <a:rPr lang="ru-RU" smtClean="0"/>
               <a:t>‹#›</a:t>
             </a:fld>
@@ -462,7 +462,7 @@
           <a:bodyPr/>
           <a:lstStyle/>
           <a:p>
-            <a:fld id="{C7E4E9C9-9016-4368-BA52-5736E646B3E9}" type="datetimeFigureOut">
+            <a:fld id="{2E653D21-FDBD-4484-ADF8-8F544B7EA25E}" type="datetimeFigureOut">
               <a:rPr lang="ru-RU" smtClean="0"/>
               <a:t>15.04.2026</a:t>
             </a:fld>
@@ -504,7 +504,7 @@
           <a:bodyPr/>
           <a:lstStyle/>
           <a:p>
-            <a:fld id="{16FDC8A4-5E87-4C3F-9CFD-168A28BF40D9}" type="slidenum">
+            <a:fld id="{B5C6536A-5FA9-4DEE-8A2F-80058FF184E8}" type="slidenum">
               <a:rPr lang="ru-RU" smtClean="0"/>
               <a:t>‹#›</a:t>
             </a:fld>
@@ -637,7 +637,7 @@
           <a:bodyPr/>
           <a:lstStyle/>
           <a:p>
-            <a:fld id="{C7E4E9C9-9016-4368-BA52-5736E646B3E9}" type="datetimeFigureOut">
+            <a:fld id="{2E653D21-FDBD-4484-ADF8-8F544B7EA25E}" type="datetimeFigureOut">
               <a:rPr lang="ru-RU" smtClean="0"/>
               <a:t>15.04.2026</a:t>
             </a:fld>
@@ -679,7 +679,7 @@
           <a:bodyPr/>
           <a:lstStyle/>
           <a:p>
-            <a:fld id="{16FDC8A4-5E87-4C3F-9CFD-168A28BF40D9}" type="slidenum">
+            <a:fld id="{B5C6536A-5FA9-4DEE-8A2F-80058FF184E8}" type="slidenum">
               <a:rPr lang="ru-RU" smtClean="0"/>
               <a:t>‹#›</a:t>
             </a:fld>
@@ -802,7 +802,7 @@
           <a:bodyPr/>
           <a:lstStyle/>
           <a:p>
-            <a:fld id="{C7E4E9C9-9016-4368-BA52-5736E646B3E9}" type="datetimeFigureOut">
+            <a:fld id="{2E653D21-FDBD-4484-ADF8-8F544B7EA25E}" type="datetimeFigureOut">
               <a:rPr lang="ru-RU" smtClean="0"/>
               <a:t>15.04.2026</a:t>
             </a:fld>
@@ -844,7 +844,7 @@
           <a:bodyPr/>
           <a:lstStyle/>
           <a:p>
-            <a:fld id="{16FDC8A4-5E87-4C3F-9CFD-168A28BF40D9}" type="slidenum">
+            <a:fld id="{B5C6536A-5FA9-4DEE-8A2F-80058FF184E8}" type="slidenum">
               <a:rPr lang="ru-RU" smtClean="0"/>
               <a:t>‹#›</a:t>
             </a:fld>
@@ -967,7 +967,7 @@
           <a:bodyPr/>
           <a:lstStyle/>
           <a:p>
-            <a:fld id="{C7E4E9C9-9016-4368-BA52-5736E646B3E9}" type="datetimeFigureOut">
+            <a:fld id="{2E653D21-FDBD-4484-ADF8-8F544B7EA25E}" type="datetimeFigureOut">
               <a:rPr lang="ru-RU" smtClean="0"/>
               <a:t>15.04.2026</a:t>
             </a:fld>
@@ -1009,7 +1009,7 @@
           <a:bodyPr/>
           <a:lstStyle/>
           <a:p>
-            <a:fld id="{16FDC8A4-5E87-4C3F-9CFD-168A28BF40D9}" type="slidenum">
+            <a:fld id="{B5C6536A-5FA9-4DEE-8A2F-80058FF184E8}" type="slidenum">
               <a:rPr lang="ru-RU" smtClean="0"/>
               <a:t>‹#›</a:t>
             </a:fld>
@@ -1208,7 +1208,7 @@
           <a:bodyPr/>
           <a:lstStyle/>
           <a:p>
-            <a:fld id="{C7E4E9C9-9016-4368-BA52-5736E646B3E9}" type="datetimeFigureOut">
+            <a:fld id="{2E653D21-FDBD-4484-ADF8-8F544B7EA25E}" type="datetimeFigureOut">
               <a:rPr lang="ru-RU" smtClean="0"/>
               <a:t>15.04.2026</a:t>
             </a:fld>
@@ -1250,7 +1250,7 @@
           <a:bodyPr/>
           <a:lstStyle/>
           <a:p>
-            <a:fld id="{16FDC8A4-5E87-4C3F-9CFD-168A28BF40D9}" type="slidenum">
+            <a:fld id="{B5C6536A-5FA9-4DEE-8A2F-80058FF184E8}" type="slidenum">
               <a:rPr lang="ru-RU" smtClean="0"/>
               <a:t>‹#›</a:t>
             </a:fld>
@@ -1491,7 +1491,7 @@
           <a:bodyPr/>
           <a:lstStyle/>
           <a:p>
-            <a:fld id="{C7E4E9C9-9016-4368-BA52-5736E646B3E9}" type="datetimeFigureOut">
+            <a:fld id="{2E653D21-FDBD-4484-ADF8-8F544B7EA25E}" type="datetimeFigureOut">
               <a:rPr lang="ru-RU" smtClean="0"/>
               <a:t>15.04.2026</a:t>
             </a:fld>
@@ -1533,7 +1533,7 @@
           <a:bodyPr/>
           <a:lstStyle/>
           <a:p>
-            <a:fld id="{16FDC8A4-5E87-4C3F-9CFD-168A28BF40D9}" type="slidenum">
+            <a:fld id="{B5C6536A-5FA9-4DEE-8A2F-80058FF184E8}" type="slidenum">
               <a:rPr lang="ru-RU" smtClean="0"/>
               <a:t>‹#›</a:t>
             </a:fld>
@@ -1908,7 +1908,7 @@
           <a:bodyPr/>
           <a:lstStyle/>
           <a:p>
-            <a:fld id="{C7E4E9C9-9016-4368-BA52-5736E646B3E9}" type="datetimeFigureOut">
+            <a:fld id="{2E653D21-FDBD-4484-ADF8-8F544B7EA25E}" type="datetimeFigureOut">
               <a:rPr lang="ru-RU" smtClean="0"/>
               <a:t>15.04.2026</a:t>
             </a:fld>
@@ -1950,7 +1950,7 @@
           <a:bodyPr/>
           <a:lstStyle/>
           <a:p>
-            <a:fld id="{16FDC8A4-5E87-4C3F-9CFD-168A28BF40D9}" type="slidenum">
+            <a:fld id="{B5C6536A-5FA9-4DEE-8A2F-80058FF184E8}" type="slidenum">
               <a:rPr lang="ru-RU" smtClean="0"/>
               <a:t>‹#›</a:t>
             </a:fld>
@@ -2021,7 +2021,7 @@
           <a:bodyPr/>
           <a:lstStyle/>
           <a:p>
-            <a:fld id="{C7E4E9C9-9016-4368-BA52-5736E646B3E9}" type="datetimeFigureOut">
+            <a:fld id="{2E653D21-FDBD-4484-ADF8-8F544B7EA25E}" type="datetimeFigureOut">
               <a:rPr lang="ru-RU" smtClean="0"/>
               <a:t>15.04.2026</a:t>
             </a:fld>
@@ -2063,7 +2063,7 @@
           <a:bodyPr/>
           <a:lstStyle/>
           <a:p>
-            <a:fld id="{16FDC8A4-5E87-4C3F-9CFD-168A28BF40D9}" type="slidenum">
+            <a:fld id="{B5C6536A-5FA9-4DEE-8A2F-80058FF184E8}" type="slidenum">
               <a:rPr lang="ru-RU" smtClean="0"/>
               <a:t>‹#›</a:t>
             </a:fld>
@@ -2111,7 +2111,7 @@
           <a:bodyPr/>
           <a:lstStyle/>
           <a:p>
-            <a:fld id="{C7E4E9C9-9016-4368-BA52-5736E646B3E9}" type="datetimeFigureOut">
+            <a:fld id="{2E653D21-FDBD-4484-ADF8-8F544B7EA25E}" type="datetimeFigureOut">
               <a:rPr lang="ru-RU" smtClean="0"/>
               <a:t>15.04.2026</a:t>
             </a:fld>
@@ -2153,7 +2153,7 @@
           <a:bodyPr/>
           <a:lstStyle/>
           <a:p>
-            <a:fld id="{16FDC8A4-5E87-4C3F-9CFD-168A28BF40D9}" type="slidenum">
+            <a:fld id="{B5C6536A-5FA9-4DEE-8A2F-80058FF184E8}" type="slidenum">
               <a:rPr lang="ru-RU" smtClean="0"/>
               <a:t>‹#›</a:t>
             </a:fld>
@@ -2383,7 +2383,7 @@
           <a:bodyPr/>
           <a:lstStyle/>
           <a:p>
-            <a:fld id="{C7E4E9C9-9016-4368-BA52-5736E646B3E9}" type="datetimeFigureOut">
+            <a:fld id="{2E653D21-FDBD-4484-ADF8-8F544B7EA25E}" type="datetimeFigureOut">
               <a:rPr lang="ru-RU" smtClean="0"/>
               <a:t>15.04.2026</a:t>
             </a:fld>
@@ -2425,7 +2425,7 @@
           <a:bodyPr/>
           <a:lstStyle/>
           <a:p>
-            <a:fld id="{16FDC8A4-5E87-4C3F-9CFD-168A28BF40D9}" type="slidenum">
+            <a:fld id="{B5C6536A-5FA9-4DEE-8A2F-80058FF184E8}" type="slidenum">
               <a:rPr lang="ru-RU" smtClean="0"/>
               <a:t>‹#›</a:t>
             </a:fld>
@@ -2631,7 +2631,7 @@
           <a:bodyPr/>
           <a:lstStyle/>
           <a:p>
-            <a:fld id="{C7E4E9C9-9016-4368-BA52-5736E646B3E9}" type="datetimeFigureOut">
+            <a:fld id="{2E653D21-FDBD-4484-ADF8-8F544B7EA25E}" type="datetimeFigureOut">
               <a:rPr lang="ru-RU" smtClean="0"/>
               <a:t>15.04.2026</a:t>
             </a:fld>
@@ -2673,7 +2673,7 @@
           <a:bodyPr/>
           <a:lstStyle/>
           <a:p>
-            <a:fld id="{16FDC8A4-5E87-4C3F-9CFD-168A28BF40D9}" type="slidenum">
+            <a:fld id="{B5C6536A-5FA9-4DEE-8A2F-80058FF184E8}" type="slidenum">
               <a:rPr lang="ru-RU" smtClean="0"/>
               <a:t>‹#›</a:t>
             </a:fld>
@@ -2839,7 +2839,7 @@
             </a:lvl1pPr>
           </a:lstStyle>
           <a:p>
-            <a:fld id="{C7E4E9C9-9016-4368-BA52-5736E646B3E9}" type="datetimeFigureOut">
+            <a:fld id="{2E653D21-FDBD-4484-ADF8-8F544B7EA25E}" type="datetimeFigureOut">
               <a:rPr lang="ru-RU" smtClean="0"/>
               <a:t>15.04.2026</a:t>
             </a:fld>
@@ -2917,7 +2917,7 @@
             </a:lvl1pPr>
           </a:lstStyle>
           <a:p>
-            <a:fld id="{16FDC8A4-5E87-4C3F-9CFD-168A28BF40D9}" type="slidenum">
+            <a:fld id="{B5C6536A-5FA9-4DEE-8A2F-80058FF184E8}" type="slidenum">
               <a:rPr lang="ru-RU" smtClean="0"/>
               <a:t>‹#›</a:t>
             </a:fld>
@@ -3224,14 +3224,12 @@
         </p:nvSpPr>
         <p:spPr/>
         <p:txBody>
-          <a:bodyPr>
-            <a:normAutofit fontScale="90000"/>
-          </a:bodyPr>
-          <a:lstStyle/>
-          <a:p>
-            <a:r>
-              <a:rPr lang="ru-RU" smtClean="0"/>
-              <a:t>Слайд 1. Аналитика ФП/СФП: ключевые выводы</a:t>
+          <a:bodyPr/>
+          <a:lstStyle/>
+          <a:p>
+            <a:r>
+              <a:rPr lang="ru-RU" smtClean="0"/>
+              <a:t>Слайд 1. Основание и периметр</a:t>
             </a:r>
             <a:endParaRPr lang="ru-RU"/>
           </a:p>
@@ -3254,25 +3252,25 @@
           <a:p>
             <a:r>
               <a:rPr lang="ru-RU" smtClean="0"/>
+              <a:t>- Источники: 4 финальных отчета (ДМУКП, ДР, динамика ФП, мониторинг).</a:t>
+            </a:r>
+          </a:p>
+          <a:p>
+            <a:r>
+              <a:rPr lang="ru-RU" smtClean="0"/>
               <a:t>- Период: 2023-2025.</a:t>
             </a:r>
           </a:p>
           <a:p>
             <a:r>
               <a:rPr lang="ru-RU" smtClean="0"/>
-              <a:t>- Периметр: CRM + дефолты + мониторинг.</a:t>
-            </a:r>
-          </a:p>
-          <a:p>
-            <a:r>
-              <a:rPr lang="ru-RU" smtClean="0"/>
               <a:t>- Сегменты: МкБ, МСБ, ККБ.</a:t>
             </a:r>
           </a:p>
           <a:p>
             <a:r>
               <a:rPr lang="ru-RU" smtClean="0"/>
-              <a:t>- Цель: выделить ФП/СФП и комбинации, которые реально связаны с дефолтом.</a:t>
+              <a:t>- Единица анализа: компания (ИНН) и карточка ФП/СФП.</a:t>
             </a:r>
             <a:endParaRPr lang="ru-RU"/>
           </a:p>
@@ -3315,12 +3313,14 @@
         </p:nvSpPr>
         <p:spPr/>
         <p:txBody>
-          <a:bodyPr/>
-          <a:lstStyle/>
-          <a:p>
-            <a:r>
-              <a:rPr lang="ru-RU" smtClean="0"/>
-              <a:t>Слайд 10. Сегмент ККБ: решение</a:t>
+          <a:bodyPr>
+            <a:normAutofit fontScale="90000"/>
+          </a:bodyPr>
+          <a:lstStyle/>
+          <a:p>
+            <a:r>
+              <a:rPr lang="ru-RU" smtClean="0"/>
+              <a:t>Слайд 10. Результаты мониторинга: ИПУ</a:t>
             </a:r>
             <a:endParaRPr lang="ru-RU"/>
           </a:p>
@@ -3343,19 +3343,25 @@
           <a:p>
             <a:r>
               <a:rPr lang="ru-RU" smtClean="0"/>
-              <a:t>- Выделить кластер 29.x как отдельный контур.</a:t>
-            </a:r>
-          </a:p>
-          <a:p>
-            <a:r>
-              <a:rPr lang="ru-RU" smtClean="0"/>
-              <a:t>- Усилить правила совместного срабатывания 29.x и 16.x.</a:t>
-            </a:r>
-          </a:p>
-          <a:p>
-            <a:r>
-              <a:rPr lang="ru-RU" smtClean="0"/>
-              <a:t>- Ожидаемый эффект: более релевантный контроль ковенантного риска.</a:t>
+              <a:t>- На ИПУ: 12 858 карточек.</a:t>
+            </a:r>
+          </a:p>
+          <a:p>
+            <a:r>
+              <a:rPr lang="ru-RU" smtClean="0"/>
+              <a:t>- Положительные итоги ИПУ: 87,8%; отрицательные: 1,0%; активные: 9,2%.</a:t>
+            </a:r>
+          </a:p>
+          <a:p>
+            <a:r>
+              <a:rPr lang="ru-RU" smtClean="0"/>
+              <a:t>- МкБ: 91,8% положительных; ККБ: 74,4% положительных и 21,0% активных.</a:t>
+            </a:r>
+          </a:p>
+          <a:p>
+            <a:r>
+              <a:rPr lang="ru-RU" smtClean="0"/>
+              <a:t>- Вывод: ИПУ эффективен, но ККБ требует ускорения цикла.</a:t>
             </a:r>
             <a:endParaRPr lang="ru-RU"/>
           </a:p>
@@ -3405,7 +3411,7 @@
           <a:p>
             <a:r>
               <a:rPr lang="ru-RU" smtClean="0"/>
-              <a:t>Слайд 11. Дорожная карта внедрения</a:t>
+              <a:t>Слайд 11. Проблемные зоны и быстрые меры</a:t>
             </a:r>
             <a:endParaRPr lang="ru-RU"/>
           </a:p>
@@ -3423,24 +3429,32 @@
         </p:nvSpPr>
         <p:spPr/>
         <p:txBody>
-          <a:bodyPr/>
-          <a:lstStyle/>
-          <a:p>
-            <a:r>
-              <a:rPr lang="ru-RU" smtClean="0"/>
-              <a:t>- 0-3 месяца: очистка мониторинга, маркировка редких ФП, дашборды.</a:t>
-            </a:r>
-          </a:p>
-          <a:p>
-            <a:r>
-              <a:rPr lang="ru-RU" smtClean="0"/>
-              <a:t>- 3-6 месяцев: обновление порогов и внедрение комбинационных триггеров.</a:t>
-            </a:r>
-          </a:p>
-          <a:p>
-            <a:r>
-              <a:rPr lang="ru-RU" smtClean="0"/>
-              <a:t>- 6+ месяцев: переоценка на новых данных и донастройка ДМУКП-логики.</a:t>
+          <a:bodyPr>
+            <a:normAutofit lnSpcReduction="10000"/>
+          </a:bodyPr>
+          <a:lstStyle/>
+          <a:p>
+            <a:r>
+              <a:rPr lang="ru-RU" smtClean="0"/>
+              <a:t>- Высокая доля ошибок по СФП (более 40% в мониторинге; особенно 40.1 и 15.2У).</a:t>
+            </a:r>
+          </a:p>
+          <a:p>
+            <a:r>
+              <a:rPr lang="ru-RU" smtClean="0"/>
+              <a:t>- ФП 16.1 - аномально высокий уровень ошибок среди ФП.</a:t>
+            </a:r>
+          </a:p>
+          <a:p>
+            <a:r>
+              <a:rPr lang="ru-RU" smtClean="0"/>
+              <a:t>- 1 316 карточек не попали в 6-группную классификацию результатов.</a:t>
+            </a:r>
+          </a:p>
+          <a:p>
+            <a:r>
+              <a:rPr lang="ru-RU" smtClean="0"/>
+              <a:t>- Меры: пересмотр критериев СФП, расширение классификатора, контроль качества дат.</a:t>
             </a:r>
             <a:endParaRPr lang="ru-RU"/>
           </a:p>
@@ -3483,12 +3497,14 @@
         </p:nvSpPr>
         <p:spPr/>
         <p:txBody>
-          <a:bodyPr/>
-          <a:lstStyle/>
-          <a:p>
-            <a:r>
-              <a:rPr lang="ru-RU" smtClean="0"/>
-              <a:t>Слайд 12. Решение на комитет</a:t>
+          <a:bodyPr>
+            <a:normAutofit fontScale="90000"/>
+          </a:bodyPr>
+          <a:lstStyle/>
+          <a:p>
+            <a:r>
+              <a:rPr lang="ru-RU" smtClean="0"/>
+              <a:t>Слайд 12. Решение и KPI на комитет</a:t>
             </a:r>
             <a:endParaRPr lang="ru-RU"/>
           </a:p>
@@ -3506,36 +3522,32 @@
         </p:nvSpPr>
         <p:spPr/>
         <p:txBody>
-          <a:bodyPr/>
-          <a:lstStyle/>
-          <a:p>
-            <a:r>
-              <a:rPr lang="ru-RU" smtClean="0"/>
-              <a:t>- Утвердить переход к сегментным комбинационным правилам.</a:t>
-            </a:r>
-          </a:p>
-          <a:p>
-            <a:r>
-              <a:rPr lang="ru-RU" smtClean="0"/>
-              <a:t>- Запустить пилот с контрольными KPI:</a:t>
-            </a:r>
-          </a:p>
-          <a:p>
-            <a:r>
-              <a:rPr lang="ru-RU" smtClean="0"/>
-              <a:t>- доля ложных срабатываний;</a:t>
-            </a:r>
-          </a:p>
-          <a:p>
-            <a:r>
-              <a:rPr lang="ru-RU" smtClean="0"/>
-              <a:t>- DR capture;</a:t>
-            </a:r>
-          </a:p>
-          <a:p>
-            <a:r>
-              <a:rPr lang="ru-RU" smtClean="0"/>
-              <a:t>- стабильность Lift по кварталам.</a:t>
+          <a:bodyPr>
+            <a:normAutofit lnSpcReduction="10000"/>
+          </a:bodyPr>
+          <a:lstStyle/>
+          <a:p>
+            <a:r>
+              <a:rPr lang="ru-RU" smtClean="0"/>
+              <a:t>- Утвердить сегментные правила мониторинга вместо единых.</a:t>
+            </a:r>
+          </a:p>
+          <a:p>
+            <a:r>
+              <a:rPr lang="ru-RU" smtClean="0"/>
+              <a:t>- Внедрить комбинационные триггеры (пары/тройки) в контур эскалации.</a:t>
+            </a:r>
+          </a:p>
+          <a:p>
+            <a:r>
+              <a:rPr lang="ru-RU" smtClean="0"/>
+              <a:t>- KPI: доля ошибок выявления, доля активных ИПУ, срок урегулирования, DR capture.</a:t>
+            </a:r>
+          </a:p>
+          <a:p>
+            <a:r>
+              <a:rPr lang="ru-RU" smtClean="0"/>
+              <a:t>- Запустить пилот и квартальный review по МкБ/МСБ/ККБ отдельно.</a:t>
             </a:r>
             <a:endParaRPr lang="ru-RU"/>
           </a:p>
@@ -3578,12 +3590,14 @@
         </p:nvSpPr>
         <p:spPr/>
         <p:txBody>
-          <a:bodyPr/>
-          <a:lstStyle/>
-          <a:p>
-            <a:r>
-              <a:rPr lang="ru-RU" smtClean="0"/>
-              <a:t>Слайд 2. Методика в 1 минуту</a:t>
+          <a:bodyPr>
+            <a:normAutofit fontScale="90000"/>
+          </a:bodyPr>
+          <a:lstStyle/>
+          <a:p>
+            <a:r>
+              <a:rPr lang="ru-RU" smtClean="0"/>
+              <a:t>Слайд 2. Методика (ДМУКП vs ДР)</a:t>
             </a:r>
             <a:endParaRPr lang="ru-RU"/>
           </a:p>
@@ -3601,30 +3615,32 @@
         </p:nvSpPr>
         <p:spPr/>
         <p:txBody>
-          <a:bodyPr/>
-          <a:lstStyle/>
-          <a:p>
-            <a:r>
-              <a:rPr lang="ru-RU" smtClean="0"/>
-              <a:t>- Единица анализа: компания (ИНН), 9 914 компаний.</a:t>
-            </a:r>
-          </a:p>
-          <a:p>
-            <a:r>
-              <a:rPr lang="ru-RU" smtClean="0"/>
-              <a:t>- Считаем дефолт в двух логиках: ДР и ДМУКП.</a:t>
-            </a:r>
-          </a:p>
-          <a:p>
-            <a:r>
-              <a:rPr lang="ru-RU" smtClean="0"/>
-              <a:t>- Метрики: Support, Confidence, Lift.</a:t>
-            </a:r>
-          </a:p>
-          <a:p>
-            <a:r>
-              <a:rPr lang="ru-RU" smtClean="0"/>
-              <a:t>- Устойчивость: Fisher + FDR (&lt;0.05).</a:t>
+          <a:bodyPr>
+            <a:normAutofit lnSpcReduction="10000"/>
+          </a:bodyPr>
+          <a:lstStyle/>
+          <a:p>
+            <a:r>
+              <a:rPr lang="ru-RU" smtClean="0"/>
+              <a:t>- В логике ДМУКП дефолт фиксируется по определяющим ФП/СФП, дата дефолта = дата первого определяющего фактора.</a:t>
+            </a:r>
+          </a:p>
+          <a:p>
+            <a:r>
+              <a:rPr lang="ru-RU" smtClean="0"/>
+              <a:t>- В логике ДР дефолт определяется по реестру дефолтов (default_flag = 1).</a:t>
+            </a:r>
+          </a:p>
+          <a:p>
+            <a:r>
+              <a:rPr lang="ru-RU" smtClean="0"/>
+              <a:t>- ФП после даты дефолта исключаются (защита от data leakage).</a:t>
+            </a:r>
+          </a:p>
+          <a:p>
+            <a:r>
+              <a:rPr lang="ru-RU" smtClean="0"/>
+              <a:t>- Для сравнения факторов используются доля дефолта и Lift.</a:t>
             </a:r>
             <a:endParaRPr lang="ru-RU"/>
           </a:p>
@@ -3672,7 +3688,7 @@
           <a:p>
             <a:r>
               <a:rPr lang="ru-RU" smtClean="0"/>
-              <a:t>Слайд 3. Что подтвердилось</a:t>
+              <a:t>Слайд 3. База данных анализа</a:t>
             </a:r>
             <a:endParaRPr lang="ru-RU"/>
           </a:p>
@@ -3695,25 +3711,25 @@
           <a:p>
             <a:r>
               <a:rPr lang="ru-RU" smtClean="0"/>
-              <a:t>- Дефолтные компании имеют больше ФП (в среднем 7.7 vs 4.5).</a:t>
-            </a:r>
-          </a:p>
-          <a:p>
-            <a:r>
-              <a:rPr lang="ru-RU" smtClean="0"/>
-              <a:t>- Комбинации ФП сильнее одиночных ФП (Lift до 46.22).</a:t>
-            </a:r>
-          </a:p>
-          <a:p>
-            <a:r>
-              <a:rPr lang="ru-RU" smtClean="0"/>
-              <a:t>- ФП 13 - универсальный маркер риска во всех сегментах.</a:t>
-            </a:r>
-          </a:p>
-          <a:p>
-            <a:r>
-              <a:rPr lang="ru-RU" smtClean="0"/>
-              <a:t>- Сегменты отличаются по профилю риска, единое правило не оптимально.</a:t>
+              <a:t>- CRM после подготовки: 106 160 уникальных событий по 9 919 ИНН.</a:t>
+            </a:r>
+          </a:p>
+          <a:p>
+            <a:r>
+              <a:rPr lang="ru-RU" smtClean="0"/>
+              <a:t>- В динамике ФП: 99,0% событий - ФП, 1,0% - СФП.</a:t>
+            </a:r>
+          </a:p>
+          <a:p>
+            <a:r>
+              <a:rPr lang="ru-RU" smtClean="0"/>
+              <a:t>- Для мониторинга: 104 268 карточек, пригодных для анализа.</a:t>
+            </a:r>
+          </a:p>
+          <a:p>
+            <a:r>
+              <a:rPr lang="ru-RU" smtClean="0"/>
+              <a:t>- Вывод: объем данных достаточен для сегментных выводов.</a:t>
             </a:r>
             <a:endParaRPr lang="ru-RU"/>
           </a:p>
@@ -3756,12 +3772,14 @@
         </p:nvSpPr>
         <p:spPr/>
         <p:txBody>
-          <a:bodyPr/>
-          <a:lstStyle/>
-          <a:p>
-            <a:r>
-              <a:rPr lang="ru-RU" smtClean="0"/>
-              <a:t>Слайд 4. Динамика по сегментам</a:t>
+          <a:bodyPr>
+            <a:normAutofit fontScale="90000"/>
+          </a:bodyPr>
+          <a:lstStyle/>
+          <a:p>
+            <a:r>
+              <a:rPr lang="ru-RU" smtClean="0"/>
+              <a:t>Слайд 4. Дефолтность по логике ДМУКП</a:t>
             </a:r>
             <a:endParaRPr lang="ru-RU"/>
           </a:p>
@@ -3779,38 +3797,30 @@
         </p:nvSpPr>
         <p:spPr/>
         <p:txBody>
-          <a:bodyPr>
-            <a:normAutofit lnSpcReduction="10000"/>
-          </a:bodyPr>
-          <a:lstStyle/>
-          <a:p>
-            <a:r>
-              <a:rPr lang="ru-RU" smtClean="0"/>
-              <a:t>- DR близкий: МкБ 1.33%, МСБ 1.19%, ККБ 1.26%.</a:t>
-            </a:r>
-          </a:p>
-          <a:p>
-            <a:r>
-              <a:rPr lang="ru-RU" smtClean="0"/>
-              <a:t>- Но механика риска разная:</a:t>
-            </a:r>
-          </a:p>
-          <a:p>
-            <a:r>
-              <a:rPr lang="ru-RU" smtClean="0"/>
-              <a:t>- МкБ: дефолт наступает при меньшем числе ФП.</a:t>
-            </a:r>
-          </a:p>
-          <a:p>
-            <a:r>
-              <a:rPr lang="ru-RU" smtClean="0"/>
-              <a:t>- МСБ: самый сильный разрыв дефолт/недефолт по ФП.</a:t>
-            </a:r>
-          </a:p>
-          <a:p>
-            <a:r>
-              <a:rPr lang="ru-RU" smtClean="0"/>
-              <a:t>- ККБ: высока роль ковенантных и финансовых кластеров.</a:t>
+          <a:bodyPr/>
+          <a:lstStyle/>
+          <a:p>
+            <a:r>
+              <a:rPr lang="ru-RU" smtClean="0"/>
+              <a:t>- Всего дефолтных компаний: 539 (5,43%).</a:t>
+            </a:r>
+          </a:p>
+          <a:p>
+            <a:r>
+              <a:rPr lang="ru-RU" smtClean="0"/>
+              <a:t>- По сегментам: МкБ 3,97%, МСБ 5,38%, ККБ 14,13%.</a:t>
+            </a:r>
+          </a:p>
+          <a:p>
+            <a:r>
+              <a:rPr lang="ru-RU" smtClean="0"/>
+              <a:t>- После окна наблюдения 3 месяца: 500 дефолтов, DR 5,06%.</a:t>
+            </a:r>
+          </a:p>
+          <a:p>
+            <a:r>
+              <a:rPr lang="ru-RU" smtClean="0"/>
+              <a:t>- Вывод: сегмент ККБ имеет наиболее высокий риск и требует отдельных правил.</a:t>
             </a:r>
             <a:endParaRPr lang="ru-RU"/>
           </a:p>
@@ -3860,7 +3870,7 @@
           <a:p>
             <a:r>
               <a:rPr lang="ru-RU" smtClean="0"/>
-              <a:t>Слайд 5. Какие ФП самые важные</a:t>
+              <a:t>Слайд 5. Динамика ФП по сегментам</a:t>
             </a:r>
             <a:endParaRPr lang="ru-RU"/>
           </a:p>
@@ -3883,25 +3893,25 @@
           <a:p>
             <a:r>
               <a:rPr lang="ru-RU" smtClean="0"/>
-              <a:t>- Для анализа решений разделяем:</a:t>
-            </a:r>
-          </a:p>
-          <a:p>
-            <a:r>
-              <a:rPr lang="ru-RU" smtClean="0"/>
-              <a:t>- массовые ФП (частые, но не всегда "опасные");</a:t>
-            </a:r>
-          </a:p>
-          <a:p>
-            <a:r>
-              <a:rPr lang="ru-RU" smtClean="0"/>
-              <a:t>- редкие, но высокорисковые ФП.</a:t>
-            </a:r>
-          </a:p>
-          <a:p>
-            <a:r>
-              <a:rPr lang="ru-RU" smtClean="0"/>
-              <a:t>- Приоритизация строится по связке частота x Lift x устойчивость.</a:t>
+              <a:t>- 65,9% ИНН относится к МкБ; МСБ - 22,9%; ККБ - 11,2%.</a:t>
+            </a:r>
+          </a:p>
+          <a:p>
+            <a:r>
+              <a:rPr lang="ru-RU" smtClean="0"/>
+              <a:t>- Топ-3 ФП формируют 25,7% всех ФП (лидер - ФП 24, 9,2%).</a:t>
+            </a:r>
+          </a:p>
+          <a:p>
+            <a:r>
+              <a:rPr lang="ru-RU" smtClean="0"/>
+              <a:t>- В МкБ лидирует 24; в МСБ - 24.4; в ККБ - 1.2 (39,85% ФП сегмента).</a:t>
+            </a:r>
+          </a:p>
+          <a:p>
+            <a:r>
+              <a:rPr lang="ru-RU" smtClean="0"/>
+              <a:t>- Вывод: структура факторов сильно сегментирована.</a:t>
             </a:r>
             <a:endParaRPr lang="ru-RU"/>
           </a:p>
@@ -3951,7 +3961,7 @@
           <a:p>
             <a:r>
               <a:rPr lang="ru-RU" smtClean="0"/>
-              <a:t>Слайд 6. Комбинации ФП: главный источник сигнала</a:t>
+              <a:t>Слайд 6. Ключевые риск-факторы (по ДМУКП)</a:t>
             </a:r>
             <a:endParaRPr lang="ru-RU"/>
           </a:p>
@@ -3974,25 +3984,25 @@
           <a:p>
             <a:r>
               <a:rPr lang="ru-RU" smtClean="0"/>
-              <a:t>- МкБ: комбинации до 100% дефолтности.</a:t>
-            </a:r>
-          </a:p>
-          <a:p>
-            <a:r>
-              <a:rPr lang="ru-RU" smtClean="0"/>
-              <a:t>- МСБ: комбинации до 83.3%, доминирует 15.1.3.</a:t>
-            </a:r>
-          </a:p>
-          <a:p>
-            <a:r>
-              <a:rPr lang="ru-RU" smtClean="0"/>
-              <a:t>- ККБ: до 57.1%, ключевыe связки вокруг 13 + 16.x + 29.x.</a:t>
-            </a:r>
-          </a:p>
-          <a:p>
-            <a:r>
-              <a:rPr lang="ru-RU" smtClean="0"/>
-              <a:t>- Вывод: комбинационные правила обязательны.</a:t>
+              <a:t>- МкБ: семейство 15.1 (Lift 3,0-3,3).</a:t>
+            </a:r>
+          </a:p>
+          <a:p>
+            <a:r>
+              <a:rPr lang="ru-RU" smtClean="0"/>
+              <a:t>- МСБ: ФП 13.1 (Lift 5,2).</a:t>
+            </a:r>
+          </a:p>
+          <a:p>
+            <a:r>
+              <a:rPr lang="ru-RU" smtClean="0"/>
+              <a:t>- ККБ: ФП 29.13.11 и 34 (Lift 4,7-6,0).</a:t>
+            </a:r>
+          </a:p>
+          <a:p>
+            <a:r>
+              <a:rPr lang="ru-RU" smtClean="0"/>
+              <a:t>- Универсальный триггер по дефолтам: фактор 13 (54-77% дефолтов).</a:t>
             </a:r>
             <a:endParaRPr lang="ru-RU"/>
           </a:p>
@@ -4042,7 +4052,7 @@
           <a:p>
             <a:r>
               <a:rPr lang="ru-RU" smtClean="0"/>
-              <a:t>Слайд 7. Мониторинг: что мешает точности</a:t>
+              <a:t>Слайд 7. Комбинации ФП усиливают риск</a:t>
             </a:r>
             <a:endParaRPr lang="ru-RU"/>
           </a:p>
@@ -4064,26 +4074,58 @@
           <a:lstStyle/>
           <a:p>
             <a:r>
-              <a:rPr lang="ru-RU" smtClean="0"/>
-              <a:t>- В сценариях есть ошибки, технические и нейтральные статусы.</a:t>
-            </a:r>
-          </a:p>
-          <a:p>
-            <a:r>
-              <a:rPr lang="ru-RU" smtClean="0"/>
-              <a:t>- Это создает шум и ложные срабатывания.</a:t>
-            </a:r>
-          </a:p>
-          <a:p>
-            <a:r>
-              <a:rPr lang="ru-RU" smtClean="0"/>
-              <a:t>- Одновременно есть устойчивый контур позитивного урегулирования.</a:t>
-            </a:r>
-          </a:p>
-          <a:p>
-            <a:r>
-              <a:rPr lang="ru-RU" smtClean="0"/>
-              <a:t>- Быстрый эффект: чистка статусов и единая классификация исходов.</a:t>
+              <a:rPr lang="en-US" smtClean="0"/>
+              <a:t>- Lift </a:t>
+            </a:r>
+            <a:r>
+              <a:rPr lang="ru-RU" smtClean="0"/>
+              <a:t>пар/троек в среднем в 2-3 раза выше </a:t>
+            </a:r>
+            <a:r>
+              <a:rPr lang="en-US" smtClean="0"/>
+              <a:t>Lift </a:t>
+            </a:r>
+            <a:r>
+              <a:rPr lang="ru-RU" smtClean="0"/>
+              <a:t>одиночных ФП.</a:t>
+            </a:r>
+          </a:p>
+          <a:p>
+            <a:r>
+              <a:rPr lang="ru-RU" smtClean="0"/>
+              <a:t>- МкБ: тройка 15.1 + 22.2 + 24 (</a:t>
+            </a:r>
+            <a:r>
+              <a:rPr lang="en-US" smtClean="0"/>
+              <a:t>Lift 8,90).</a:t>
+            </a:r>
+          </a:p>
+          <a:p>
+            <a:r>
+              <a:rPr lang="en-US" smtClean="0"/>
+              <a:t>- </a:t>
+            </a:r>
+            <a:r>
+              <a:rPr lang="ru-RU" smtClean="0"/>
+              <a:t>МСБ: пара 15.1.1.1 + 16.1.1 (</a:t>
+            </a:r>
+            <a:r>
+              <a:rPr lang="en-US" smtClean="0"/>
+              <a:t>Lift 9,48; default rate 45,45%).</a:t>
+            </a:r>
+          </a:p>
+          <a:p>
+            <a:r>
+              <a:rPr lang="en-US" smtClean="0"/>
+              <a:t>- </a:t>
+            </a:r>
+            <a:r>
+              <a:rPr lang="ru-RU" smtClean="0"/>
+              <a:t>ККБ: пара 29.1.1.1 + 29.13.1 (</a:t>
+            </a:r>
+            <a:r>
+              <a:rPr lang="en-US" smtClean="0"/>
+              <a:t>default rate 70%; Lift 5,88).</a:t>
             </a:r>
             <a:endParaRPr lang="ru-RU"/>
           </a:p>
@@ -4126,12 +4168,14 @@
         </p:nvSpPr>
         <p:spPr/>
         <p:txBody>
-          <a:bodyPr/>
-          <a:lstStyle/>
-          <a:p>
-            <a:r>
-              <a:rPr lang="ru-RU" smtClean="0"/>
-              <a:t>Слайд 8. Сегмент МкБ: решение</a:t>
+          <a:bodyPr>
+            <a:normAutofit fontScale="90000"/>
+          </a:bodyPr>
+          <a:lstStyle/>
+          <a:p>
+            <a:r>
+              <a:rPr lang="ru-RU" smtClean="0"/>
+              <a:t>Слайд 8. Временные сигналы до дефолта</a:t>
             </a:r>
             <a:endParaRPr lang="ru-RU"/>
           </a:p>
@@ -4154,19 +4198,19 @@
           <a:p>
             <a:r>
               <a:rPr lang="ru-RU" smtClean="0"/>
-              <a:t>- Усилить раннюю эскалацию для связок 13 + 14.3.x + 15.x.</a:t>
-            </a:r>
-          </a:p>
-          <a:p>
-            <a:r>
-              <a:rPr lang="ru-RU" smtClean="0"/>
-              <a:t>- Снизить порог реакции по числу ФП.</a:t>
-            </a:r>
-          </a:p>
-          <a:p>
-            <a:r>
-              <a:rPr lang="ru-RU" smtClean="0"/>
-              <a:t>- Ожидаемый эффект: ранний захват высокорисковых кейсов.</a:t>
+              <a:t>- Поздние сигналы: 15.1 (МкБ), 16.3 (МСБ), 34 (ККБ) - за 1-3 месяца до дефолта.</a:t>
+            </a:r>
+          </a:p>
+          <a:p>
+            <a:r>
+              <a:rPr lang="ru-RU" smtClean="0"/>
+              <a:t>- Ранние сигналы: 28.9, 26.1.1 и семейство 29 - за 8-24 месяца.</a:t>
+            </a:r>
+          </a:p>
+          <a:p>
+            <a:r>
+              <a:rPr lang="ru-RU" smtClean="0"/>
+              <a:t>- Вывод: требуется двухуровневый контур (наблюдение + эскалация).</a:t>
             </a:r>
             <a:endParaRPr lang="ru-RU"/>
           </a:p>
@@ -4209,12 +4253,14 @@
         </p:nvSpPr>
         <p:spPr/>
         <p:txBody>
-          <a:bodyPr/>
-          <a:lstStyle/>
-          <a:p>
-            <a:r>
-              <a:rPr lang="ru-RU" smtClean="0"/>
-              <a:t>Слайд 9. Сегмент МСБ: решение</a:t>
+          <a:bodyPr>
+            <a:normAutofit fontScale="90000"/>
+          </a:bodyPr>
+          <a:lstStyle/>
+          <a:p>
+            <a:r>
+              <a:rPr lang="ru-RU" smtClean="0"/>
+              <a:t>Слайд 9. Результаты мониторинга: сценарии</a:t>
             </a:r>
             <a:endParaRPr lang="ru-RU"/>
           </a:p>
@@ -4237,19 +4283,25 @@
           <a:p>
             <a:r>
               <a:rPr lang="ru-RU" smtClean="0"/>
-              <a:t>- Ввести повышенный контроль для комбинаций с 15.1.3.</a:t>
-            </a:r>
-          </a:p>
-          <a:p>
-            <a:r>
-              <a:rPr lang="ru-RU" smtClean="0"/>
-              <a:t>- Для редких комбинаций применять правило минимальной поддержки.</a:t>
-            </a:r>
-          </a:p>
-          <a:p>
-            <a:r>
-              <a:rPr lang="ru-RU" smtClean="0"/>
-              <a:t>- Ожидаемый эффект: меньше переоценки редких кейсов, выше precision.</a:t>
+              <a:t>- Положительные: 47,0%.</a:t>
+            </a:r>
+          </a:p>
+          <a:p>
+            <a:r>
+              <a:rPr lang="ru-RU" smtClean="0"/>
+              <a:t>- Условно положительные: 28,8%.</a:t>
+            </a:r>
+          </a:p>
+          <a:p>
+            <a:r>
+              <a:rPr lang="ru-RU" smtClean="0"/>
+              <a:t>- Условно отрицательные: 14,0%; ошибки: 9,2%; отрицательные: 0,3%.</a:t>
+            </a:r>
+          </a:p>
+          <a:p>
+            <a:r>
+              <a:rPr lang="ru-RU" smtClean="0"/>
+              <a:t>- Итого 75,8% карточек закрываются положительно или условно положительно.</a:t>
             </a:r>
             <a:endParaRPr lang="ru-RU"/>
           </a:p>
